--- a/public/previews/v1/toys-and-play.pptx
+++ b/public/previews/v1/toys-and-play.pptx
@@ -5,7 +5,7 @@
     <p:sldMasterId id="2147483648" r:id="rId1"/>
   </p:sldMasterIdLst>
   <p:notesMasterIdLst>
-    <p:notesMasterId r:id="rId29"/>
+    <p:notesMasterId r:id="rId30"/>
   </p:notesMasterIdLst>
   <p:sldIdLst>
     <p:sldId id="256" r:id="rId2"/>
@@ -35,6 +35,7 @@
     <p:sldId id="280" r:id="rId26"/>
     <p:sldId id="281" r:id="rId27"/>
     <p:sldId id="282" r:id="rId28"/>
+    <p:sldId id="283" r:id="rId29"/>
   </p:sldIdLst>
   <p:sldSz cx="9144000" cy="5143500"/>
   <p:notesSz cx="5143500" cy="9144000"/>
@@ -2224,6 +2225,94 @@
             <a:fld id="{F7021451-1387-4CA6-816F-3879F97B5CBC}" type="slidenum">
               <a:rPr lang="en-US"/>
               <a:t>27</a:t>
+            </a:fld>
+            <a:endParaRPr lang="en-US"/>
+          </a:p>
+        </p:txBody>
+      </p:sp>
+    </p:spTree>
+    <p:extLst>
+      <p:ext uri="{BB962C8B-B14F-4D97-AF65-F5344CB8AC3E}">
+        <p14:creationId xmlns:p14="http://schemas.microsoft.com/office/powerpoint/2010/main" val="1024086991"/>
+      </p:ext>
+    </p:extLst>
+  </p:cSld>
+  <p:clrMapOvr>
+    <a:masterClrMapping/>
+  </p:clrMapOvr>
+</p:notes>
+</file>
+
+<file path=ppt/notesSlides/notesSlide28.xml><?xml version="1.0" encoding="utf-8"?>
+<p:notes xmlns:a="http://schemas.openxmlformats.org/drawingml/2006/main" xmlns:r="http://schemas.openxmlformats.org/officeDocument/2006/relationships" xmlns:p="http://schemas.openxmlformats.org/presentationml/2006/main">
+  <p:cSld>
+    <p:spTree>
+      <p:nvGrpSpPr>
+        <p:cNvPr id="1" name=""/>
+        <p:cNvGrpSpPr/>
+        <p:nvPr/>
+      </p:nvGrpSpPr>
+      <p:grpSpPr>
+        <a:xfrm>
+          <a:off x="0" y="0"/>
+          <a:ext cx="0" cy="0"/>
+          <a:chOff x="0" y="0"/>
+          <a:chExt cx="0" cy="0"/>
+        </a:xfrm>
+      </p:grpSpPr>
+      <p:sp>
+        <p:nvSpPr>
+          <p:cNvPr id="2" name="Slide Image Placeholder 1"/>
+          <p:cNvSpPr>
+            <a:spLocks noGrp="1" noRot="1" noChangeAspect="1"/>
+          </p:cNvSpPr>
+          <p:nvPr>
+            <p:ph type="sldImg"/>
+          </p:nvPr>
+        </p:nvSpPr>
+        <p:spPr/>
+      </p:sp>
+      <p:sp>
+        <p:nvSpPr>
+          <p:cNvPr id="3" name="Notes Placeholder 2"/>
+          <p:cNvSpPr>
+            <a:spLocks noGrp="1"/>
+          </p:cNvSpPr>
+          <p:nvPr>
+            <p:ph type="body" idx="1"/>
+          </p:nvPr>
+        </p:nvSpPr>
+        <p:spPr/>
+        <p:txBody>
+          <a:bodyPr/>
+          <a:lstStyle/>
+          <a:p>
+            <a:r>
+              <a:rPr lang="en-US" dirty="0"/>
+              <a:t/>
+            </a:r>
+            <a:endParaRPr lang="en-US" dirty="0"/>
+          </a:p>
+        </p:txBody>
+      </p:sp>
+      <p:sp>
+        <p:nvSpPr>
+          <p:cNvPr id="4" name="Slide Number Placeholder 3"/>
+          <p:cNvSpPr>
+            <a:spLocks noGrp="1"/>
+          </p:cNvSpPr>
+          <p:nvPr>
+            <p:ph type="sldNum" sz="quarter" idx="10"/>
+          </p:nvPr>
+        </p:nvSpPr>
+        <p:spPr/>
+        <p:txBody>
+          <a:bodyPr/>
+          <a:lstStyle/>
+          <a:p>
+            <a:fld id="{F7021451-1387-4CA6-816F-3879F97B5CBC}" type="slidenum">
+              <a:rPr lang="en-US"/>
+              <a:t>28</a:t>
             </a:fld>
             <a:endParaRPr lang="en-US"/>
           </a:p>
@@ -3417,7 +3506,7 @@
                 <a:ea typeface="Trebuchet MS" pitchFamily="34" charset="-122"/>
                 <a:cs typeface="Trebuchet MS" pitchFamily="34" charset="-120"/>
               </a:rPr>
-              <a:t>Listen for details</a:t>
+              <a:t>Read and notice</a:t>
             </a:r>
             <a:endParaRPr lang="en-US" sz="3600" dirty="0"/>
           </a:p>
@@ -3489,7 +3578,7 @@
                 <a:ea typeface="Verdana" pitchFamily="34" charset="-122"/>
                 <a:cs typeface="Verdana" pitchFamily="34" charset="-120"/>
               </a:rPr>
-              <a:t>Sam’s Play Table</a:t>
+              <a:t>The Toy Swap</a:t>
             </a:r>
             <a:endParaRPr lang="en-US" sz="2400" dirty="0"/>
           </a:p>
@@ -3557,7 +3646,7 @@
                 <a:ea typeface="Verdana" pitchFamily="34" charset="-122"/>
                 <a:cs typeface="Verdana" pitchFamily="34" charset="-120"/>
               </a:rPr>
-              <a:t>Listen. Then answer.</a:t>
+              <a:t>Who has the train at the start?</a:t>
             </a:r>
             <a:endParaRPr lang="en-US" sz="1500" dirty="0"/>
           </a:p>
@@ -3689,7 +3778,7 @@
                 <a:ea typeface="Trebuchet MS" pitchFamily="34" charset="-122"/>
                 <a:cs typeface="Trebuchet MS" pitchFamily="34" charset="-120"/>
               </a:rPr>
-              <a:t>Useful language</a:t>
+              <a:t>Listen for details</a:t>
             </a:r>
             <a:endParaRPr lang="en-US" sz="3600" dirty="0"/>
           </a:p>
@@ -3743,15 +3832,14 @@
           </a:bodyPr>
           <a:lstStyle/>
           <a:p>
-            <a:pPr algn="just" marL="342900" indent="-342900">
+            <a:pPr algn="just" indent="0" marL="0">
               <a:lnSpc>
                 <a:spcPct val="115000"/>
               </a:lnSpc>
               <a:spcAft>
                 <a:spcPts val="1200"/>
               </a:spcAft>
-              <a:buSzPct val="100000"/>
-              <a:buChar char="•"/>
+              <a:buNone/>
             </a:pPr>
             <a:r>
               <a:rPr lang="en-US" sz="2400" dirty="0">
@@ -3762,31 +3850,7 @@
                 <a:ea typeface="Verdana" pitchFamily="34" charset="-122"/>
                 <a:cs typeface="Verdana" pitchFamily="34" charset="-120"/>
               </a:rPr>
-              <a:t>What is it?</a:t>
-            </a:r>
-            <a:endParaRPr lang="en-US" sz="2400" dirty="0"/>
-          </a:p>
-          <a:p>
-            <a:pPr algn="just" marL="342900" indent="-342900">
-              <a:lnSpc>
-                <a:spcPct val="115000"/>
-              </a:lnSpc>
-              <a:spcAft>
-                <a:spcPts val="1200"/>
-              </a:spcAft>
-              <a:buSzPct val="100000"/>
-              <a:buChar char="•"/>
-            </a:pPr>
-            <a:r>
-              <a:rPr lang="en-US" sz="2400" dirty="0">
-                <a:solidFill>
-                  <a:srgbClr val="20303A"/>
-                </a:solidFill>
-                <a:latin typeface="Verdana" pitchFamily="34" charset="0"/>
-                <a:ea typeface="Verdana" pitchFamily="34" charset="-122"/>
-                <a:cs typeface="Verdana" pitchFamily="34" charset="-120"/>
-              </a:rPr>
-              <a:t>It is a ___.</a:t>
+              <a:t>Sam’s Play Table</a:t>
             </a:r>
             <a:endParaRPr lang="en-US" sz="2400" dirty="0"/>
           </a:p>
@@ -3854,7 +3918,7 @@
                 <a:ea typeface="Verdana" pitchFamily="34" charset="-122"/>
                 <a:cs typeface="Verdana" pitchFamily="34" charset="-120"/>
               </a:rPr>
-              <a:t>Say a sentence.</a:t>
+              <a:t>Listen. Then answer.</a:t>
             </a:r>
             <a:endParaRPr lang="en-US" sz="1500" dirty="0"/>
           </a:p>
@@ -4059,7 +4123,7 @@
                 <a:ea typeface="Verdana" pitchFamily="34" charset="-122"/>
                 <a:cs typeface="Verdana" pitchFamily="34" charset="-120"/>
               </a:rPr>
-              <a:t>I have a ___.</a:t>
+              <a:t>What is it?</a:t>
             </a:r>
             <a:endParaRPr lang="en-US" sz="2400" dirty="0"/>
           </a:p>
@@ -4083,7 +4147,7 @@
                 <a:ea typeface="Verdana" pitchFamily="34" charset="-122"/>
                 <a:cs typeface="Verdana" pitchFamily="34" charset="-120"/>
               </a:rPr>
-              <a:t>Do you want it?</a:t>
+              <a:t>It is a ___.</a:t>
             </a:r>
             <a:endParaRPr lang="en-US" sz="2400" dirty="0"/>
           </a:p>
@@ -4356,7 +4420,31 @@
                 <a:ea typeface="Verdana" pitchFamily="34" charset="-122"/>
                 <a:cs typeface="Verdana" pitchFamily="34" charset="-120"/>
               </a:rPr>
-              <a:t>I want the ___, please.</a:t>
+              <a:t>I have a ___.</a:t>
+            </a:r>
+            <a:endParaRPr lang="en-US" sz="2400" dirty="0"/>
+          </a:p>
+          <a:p>
+            <a:pPr algn="just" marL="342900" indent="-342900">
+              <a:lnSpc>
+                <a:spcPct val="115000"/>
+              </a:lnSpc>
+              <a:spcAft>
+                <a:spcPts val="1200"/>
+              </a:spcAft>
+              <a:buSzPct val="100000"/>
+              <a:buChar char="•"/>
+            </a:pPr>
+            <a:r>
+              <a:rPr lang="en-US" sz="2400" dirty="0">
+                <a:solidFill>
+                  <a:srgbClr val="20303A"/>
+                </a:solidFill>
+                <a:latin typeface="Verdana" pitchFamily="34" charset="0"/>
+                <a:ea typeface="Verdana" pitchFamily="34" charset="-122"/>
+                <a:cs typeface="Verdana" pitchFamily="34" charset="-120"/>
+              </a:rPr>
+              <a:t>Do you want it?</a:t>
             </a:r>
             <a:endParaRPr lang="en-US" sz="2400" dirty="0"/>
           </a:p>
@@ -4556,7 +4644,7 @@
                 <a:ea typeface="Trebuchet MS" pitchFamily="34" charset="-122"/>
                 <a:cs typeface="Trebuchet MS" pitchFamily="34" charset="-120"/>
               </a:rPr>
-              <a:t>The toy lending table · 1</a:t>
+              <a:t>Useful language</a:t>
             </a:r>
             <a:endParaRPr lang="en-US" sz="3600" dirty="0"/>
           </a:p>
@@ -4610,14 +4698,15 @@
           </a:bodyPr>
           <a:lstStyle/>
           <a:p>
-            <a:pPr algn="just" indent="0" marL="0">
+            <a:pPr algn="just" marL="342900" indent="-342900">
               <a:lnSpc>
                 <a:spcPct val="115000"/>
               </a:lnSpc>
               <a:spcAft>
                 <a:spcPts val="1200"/>
               </a:spcAft>
-              <a:buNone/>
+              <a:buSzPct val="100000"/>
+              <a:buChar char="•"/>
             </a:pPr>
             <a:r>
               <a:rPr lang="en-US" sz="2400" dirty="0">
@@ -4628,7 +4717,7 @@
                 <a:ea typeface="Verdana" pitchFamily="34" charset="-122"/>
                 <a:cs typeface="Verdana" pitchFamily="34" charset="-120"/>
               </a:rPr>
-              <a:t>Partner A: You have the ball and car. Ask for the teddy.</a:t>
+              <a:t>I want the ___, please.</a:t>
             </a:r>
             <a:endParaRPr lang="en-US" sz="2400" dirty="0"/>
           </a:p>
@@ -4696,7 +4785,7 @@
                 <a:ea typeface="Verdana" pitchFamily="34" charset="-122"/>
                 <a:cs typeface="Verdana" pitchFamily="34" charset="-120"/>
               </a:rPr>
-              <a:t>Take turns.</a:t>
+              <a:t>Say a sentence.</a:t>
             </a:r>
             <a:endParaRPr lang="en-US" sz="1500" dirty="0"/>
           </a:p>
@@ -4828,7 +4917,7 @@
                 <a:ea typeface="Trebuchet MS" pitchFamily="34" charset="-122"/>
                 <a:cs typeface="Trebuchet MS" pitchFamily="34" charset="-120"/>
               </a:rPr>
-              <a:t>The toy lending table · 2</a:t>
+              <a:t>The toy lending table · 1</a:t>
             </a:r>
             <a:endParaRPr lang="en-US" sz="3600" dirty="0"/>
           </a:p>
@@ -4900,7 +4989,7 @@
                 <a:ea typeface="Verdana" pitchFamily="34" charset="-122"/>
                 <a:cs typeface="Verdana" pitchFamily="34" charset="-120"/>
               </a:rPr>
-              <a:t>Partner B: You have the doll and teddy. Ask for the car.</a:t>
+              <a:t>Partner A: You have the ball and car. Ask for the teddy.</a:t>
             </a:r>
             <a:endParaRPr lang="en-US" sz="2400" dirty="0"/>
           </a:p>
@@ -5100,7 +5189,7 @@
                 <a:ea typeface="Trebuchet MS" pitchFamily="34" charset="-122"/>
                 <a:cs typeface="Trebuchet MS" pitchFamily="34" charset="-120"/>
               </a:rPr>
-              <a:t>The toy lending table · 3</a:t>
+              <a:t>The toy lending table · 2</a:t>
             </a:r>
             <a:endParaRPr lang="en-US" sz="3600" dirty="0"/>
           </a:p>
@@ -5172,7 +5261,7 @@
                 <a:ea typeface="Verdana" pitchFamily="34" charset="-122"/>
                 <a:cs typeface="Verdana" pitchFamily="34" charset="-120"/>
               </a:rPr>
-              <a:t>Shared toy: The train belongs to the class. Ask before taking it.</a:t>
+              <a:t>Partner B: You have the doll and teddy. Ask for the car.</a:t>
             </a:r>
             <a:endParaRPr lang="en-US" sz="2400" dirty="0"/>
           </a:p>
@@ -5372,7 +5461,7 @@
                 <a:ea typeface="Trebuchet MS" pitchFamily="34" charset="-122"/>
                 <a:cs typeface="Trebuchet MS" pitchFamily="34" charset="-120"/>
               </a:rPr>
-              <a:t>Your final response</a:t>
+              <a:t>The toy lending table · 3</a:t>
             </a:r>
             <a:endParaRPr lang="en-US" sz="3600" dirty="0"/>
           </a:p>
@@ -5444,7 +5533,7 @@
                 <a:ea typeface="Verdana" pitchFamily="34" charset="-122"/>
                 <a:cs typeface="Verdana" pitchFamily="34" charset="-120"/>
               </a:rPr>
-              <a:t>Ask for a toy politely.</a:t>
+              <a:t>Shared toy: The train belongs to the class. Ask before taking it.</a:t>
             </a:r>
             <a:endParaRPr lang="en-US" sz="2400" dirty="0"/>
           </a:p>
@@ -5512,7 +5601,7 @@
                 <a:ea typeface="Verdana" pitchFamily="34" charset="-122"/>
                 <a:cs typeface="Verdana" pitchFamily="34" charset="-120"/>
               </a:rPr>
-              <a:t>Say it by yourself.</a:t>
+              <a:t>Take turns.</a:t>
             </a:r>
             <a:endParaRPr lang="en-US" sz="1500" dirty="0"/>
           </a:p>
@@ -5589,30 +5678,246 @@
           <a:chExt cx="0" cy="0"/>
         </a:xfrm>
       </p:grpSpPr>
-      <p:pic>
-        <p:nvPicPr>
-          <p:cNvPr id="2" name="Image 0" descr="preencoded.png">    </p:cNvPr>
-          <p:cNvPicPr>
-            <a:picLocks noChangeAspect="1"/>
-          </p:cNvPicPr>
-          <p:nvPr/>
-        </p:nvPicPr>
-        <p:blipFill>
-          <a:blip r:embed="rId1"/>
-          <a:stretch>
-            <a:fillRect/>
-          </a:stretch>
-        </p:blipFill>
-        <p:spPr>
-          <a:xfrm>
-            <a:off x="2651760" y="640080"/>
-            <a:ext cx="3840480" cy="3840480"/>
-          </a:xfrm>
-          <a:prstGeom prst="rect">
-            <a:avLst/>
-          </a:prstGeom>
-        </p:spPr>
-      </p:pic>
+      <p:sp>
+        <p:nvSpPr>
+          <p:cNvPr id="2" name="Shape 0"/>
+          <p:cNvSpPr/>
+          <p:nvPr/>
+        </p:nvSpPr>
+        <p:spPr>
+          <a:xfrm>
+            <a:off x="0" y="0"/>
+            <a:ext cx="9144000" cy="164592"/>
+          </a:xfrm>
+          <a:prstGeom prst="rect">
+            <a:avLst/>
+          </a:prstGeom>
+          <a:solidFill>
+            <a:srgbClr val="F4A300"/>
+          </a:solidFill>
+          <a:ln/>
+        </p:spPr>
+      </p:sp>
+      <p:sp>
+        <p:nvSpPr>
+          <p:cNvPr id="3" name="Text 1"/>
+          <p:cNvSpPr/>
+          <p:nvPr/>
+        </p:nvSpPr>
+        <p:spPr>
+          <a:xfrm>
+            <a:off x="502920" y="347472"/>
+            <a:ext cx="7680960" cy="777240"/>
+          </a:xfrm>
+          <a:prstGeom prst="rect">
+            <a:avLst/>
+          </a:prstGeom>
+          <a:noFill/>
+          <a:ln/>
+        </p:spPr>
+        <p:txBody>
+          <a:bodyPr wrap="square" rtlCol="0" anchor="ctr">
+            <a:normAutofit/>
+          </a:bodyPr>
+          <a:lstStyle/>
+          <a:p>
+            <a:pPr indent="0" marL="0">
+              <a:buNone/>
+            </a:pPr>
+            <a:r>
+              <a:rPr lang="en-US" sz="3600" b="1" dirty="0">
+                <a:solidFill>
+                  <a:srgbClr val="0B4F6C"/>
+                </a:solidFill>
+                <a:latin typeface="Trebuchet MS" pitchFamily="34" charset="0"/>
+                <a:ea typeface="Trebuchet MS" pitchFamily="34" charset="-122"/>
+                <a:cs typeface="Trebuchet MS" pitchFamily="34" charset="-120"/>
+              </a:rPr>
+              <a:t>Your final response</a:t>
+            </a:r>
+            <a:endParaRPr lang="en-US" sz="3600" dirty="0"/>
+          </a:p>
+        </p:txBody>
+      </p:sp>
+      <p:sp>
+        <p:nvSpPr>
+          <p:cNvPr id="4" name="Shape 2"/>
+          <p:cNvSpPr/>
+          <p:nvPr/>
+        </p:nvSpPr>
+        <p:spPr>
+          <a:xfrm>
+            <a:off x="502920" y="1234440"/>
+            <a:ext cx="8138160" cy="2583180"/>
+          </a:xfrm>
+          <a:prstGeom prst="rect">
+            <a:avLst/>
+          </a:prstGeom>
+          <a:solidFill>
+            <a:srgbClr val="F2FAFF"/>
+          </a:solidFill>
+          <a:ln w="12700">
+            <a:solidFill>
+              <a:srgbClr val="F2FAFF"/>
+            </a:solidFill>
+            <a:prstDash val="solid"/>
+          </a:ln>
+        </p:spPr>
+      </p:sp>
+      <p:sp>
+        <p:nvSpPr>
+          <p:cNvPr id="5" name="Text 3"/>
+          <p:cNvSpPr/>
+          <p:nvPr/>
+        </p:nvSpPr>
+        <p:spPr>
+          <a:xfrm>
+            <a:off x="777240" y="1435608"/>
+            <a:ext cx="7589520" cy="2180844"/>
+          </a:xfrm>
+          <a:prstGeom prst="rect">
+            <a:avLst/>
+          </a:prstGeom>
+          <a:noFill/>
+          <a:ln/>
+        </p:spPr>
+        <p:txBody>
+          <a:bodyPr wrap="square" lIns="0" tIns="0" rIns="0" bIns="0" rtlCol="0" anchor="t">
+            <a:normAutofit/>
+          </a:bodyPr>
+          <a:lstStyle/>
+          <a:p>
+            <a:pPr algn="just" indent="0" marL="0">
+              <a:lnSpc>
+                <a:spcPct val="115000"/>
+              </a:lnSpc>
+              <a:spcAft>
+                <a:spcPts val="1200"/>
+              </a:spcAft>
+              <a:buNone/>
+            </a:pPr>
+            <a:r>
+              <a:rPr lang="en-US" sz="2400" dirty="0">
+                <a:solidFill>
+                  <a:srgbClr val="20303A"/>
+                </a:solidFill>
+                <a:latin typeface="Verdana" pitchFamily="34" charset="0"/>
+                <a:ea typeface="Verdana" pitchFamily="34" charset="-122"/>
+                <a:cs typeface="Verdana" pitchFamily="34" charset="-120"/>
+              </a:rPr>
+              <a:t>Ask for a toy politely.</a:t>
+            </a:r>
+            <a:endParaRPr lang="en-US" sz="2400" dirty="0"/>
+          </a:p>
+        </p:txBody>
+      </p:sp>
+      <p:sp>
+        <p:nvSpPr>
+          <p:cNvPr id="6" name="Shape 4"/>
+          <p:cNvSpPr/>
+          <p:nvPr/>
+        </p:nvSpPr>
+        <p:spPr>
+          <a:xfrm>
+            <a:off x="502920" y="3973068"/>
+            <a:ext cx="8138160" cy="731520"/>
+          </a:xfrm>
+          <a:prstGeom prst="roundRect">
+            <a:avLst>
+              <a:gd name="adj" fmla="val 10000"/>
+            </a:avLst>
+          </a:prstGeom>
+          <a:solidFill>
+            <a:srgbClr val="FFF3D6"/>
+          </a:solidFill>
+          <a:ln w="12700">
+            <a:solidFill>
+              <a:srgbClr val="F4A300"/>
+            </a:solidFill>
+            <a:prstDash val="solid"/>
+          </a:ln>
+        </p:spPr>
+      </p:sp>
+      <p:sp>
+        <p:nvSpPr>
+          <p:cNvPr id="7" name="Text 5"/>
+          <p:cNvSpPr/>
+          <p:nvPr/>
+        </p:nvSpPr>
+        <p:spPr>
+          <a:xfrm>
+            <a:off x="685800" y="4027932"/>
+            <a:ext cx="7772400" cy="621792"/>
+          </a:xfrm>
+          <a:prstGeom prst="rect">
+            <a:avLst/>
+          </a:prstGeom>
+          <a:noFill/>
+          <a:ln/>
+        </p:spPr>
+        <p:txBody>
+          <a:bodyPr wrap="square" rtlCol="0" anchor="ctr">
+            <a:normAutofit/>
+          </a:bodyPr>
+          <a:lstStyle/>
+          <a:p>
+            <a:pPr algn="just" indent="0" marL="0">
+              <a:buNone/>
+            </a:pPr>
+            <a:r>
+              <a:rPr lang="en-US" sz="1500" b="1" dirty="0">
+                <a:solidFill>
+                  <a:srgbClr val="0B4F6C"/>
+                </a:solidFill>
+                <a:latin typeface="Verdana" pitchFamily="34" charset="0"/>
+                <a:ea typeface="Verdana" pitchFamily="34" charset="-122"/>
+                <a:cs typeface="Verdana" pitchFamily="34" charset="-120"/>
+              </a:rPr>
+              <a:t>Say it by yourself.</a:t>
+            </a:r>
+            <a:endParaRPr lang="en-US" sz="1500" dirty="0"/>
+          </a:p>
+        </p:txBody>
+      </p:sp>
+      <p:sp>
+        <p:nvSpPr>
+          <p:cNvPr id="8" name="Text 6"/>
+          <p:cNvSpPr/>
+          <p:nvPr/>
+        </p:nvSpPr>
+        <p:spPr>
+          <a:xfrm>
+            <a:off x="8458200" y="4732020"/>
+            <a:ext cx="457200" cy="292608"/>
+          </a:xfrm>
+          <a:prstGeom prst="rect">
+            <a:avLst/>
+          </a:prstGeom>
+          <a:noFill/>
+          <a:ln/>
+        </p:spPr>
+        <p:txBody>
+          <a:bodyPr wrap="square" rtlCol="0" anchor="ctr"/>
+          <a:lstStyle/>
+          <a:p>
+            <a:pPr algn="r" indent="0" marL="0">
+              <a:buNone/>
+            </a:pPr>
+            <a:r>
+              <a:rPr lang="en-US" sz="1100" dirty="0">
+                <a:solidFill>
+                  <a:srgbClr val="5B7280"/>
+                </a:solidFill>
+                <a:latin typeface="Verdana" pitchFamily="34" charset="0"/>
+                <a:ea typeface="Verdana" pitchFamily="34" charset="-122"/>
+                <a:cs typeface="Verdana" pitchFamily="34" charset="-120"/>
+              </a:rPr>
+              <a:t>17</a:t>
+            </a:r>
+            <a:endParaRPr lang="en-US" sz="1100" dirty="0"/>
+          </a:p>
+        </p:txBody>
+      </p:sp>
     </p:spTree>
   </p:cSld>
   <p:clrMapOvr>
@@ -5645,47 +5950,30 @@
           <a:chExt cx="0" cy="0"/>
         </a:xfrm>
       </p:grpSpPr>
-      <p:sp>
-        <p:nvSpPr>
-          <p:cNvPr id="2" name="Text 0"/>
-          <p:cNvSpPr/>
-          <p:nvPr/>
-        </p:nvSpPr>
-        <p:spPr>
-          <a:xfrm>
-            <a:off x="914400" y="1828800"/>
-            <a:ext cx="7315200" cy="1188720"/>
-          </a:xfrm>
-          <a:prstGeom prst="rect">
-            <a:avLst/>
-          </a:prstGeom>
-          <a:noFill/>
-          <a:ln/>
-        </p:spPr>
-        <p:txBody>
-          <a:bodyPr wrap="square" lIns="0" tIns="0" rIns="0" bIns="0" rtlCol="0" anchor="ctr">
-            <a:normAutofit/>
-          </a:bodyPr>
-          <a:lstStyle/>
-          <a:p>
-            <a:pPr algn="ctr" indent="0" marL="0">
-              <a:buNone/>
-            </a:pPr>
-            <a:r>
-              <a:rPr lang="en-US" sz="4400" b="1" dirty="0">
-                <a:solidFill>
-                  <a:srgbClr val="0B4F6C"/>
-                </a:solidFill>
-                <a:latin typeface="Verdana" pitchFamily="34" charset="0"/>
-                <a:ea typeface="Verdana" pitchFamily="34" charset="-122"/>
-                <a:cs typeface="Verdana" pitchFamily="34" charset="-120"/>
-              </a:rPr>
-              <a:t>Ball</a:t>
-            </a:r>
-            <a:endParaRPr lang="en-US" sz="4400" dirty="0"/>
-          </a:p>
-        </p:txBody>
-      </p:sp>
+      <p:pic>
+        <p:nvPicPr>
+          <p:cNvPr id="2" name="Image 0" descr="preencoded.png">    </p:cNvPr>
+          <p:cNvPicPr>
+            <a:picLocks noChangeAspect="1"/>
+          </p:cNvPicPr>
+          <p:nvPr/>
+        </p:nvPicPr>
+        <p:blipFill>
+          <a:blip r:embed="rId1"/>
+          <a:stretch>
+            <a:fillRect/>
+          </a:stretch>
+        </p:blipFill>
+        <p:spPr>
+          <a:xfrm>
+            <a:off x="2651760" y="640080"/>
+            <a:ext cx="3840480" cy="3840480"/>
+          </a:xfrm>
+          <a:prstGeom prst="rect">
+            <a:avLst/>
+          </a:prstGeom>
+        </p:spPr>
+      </p:pic>
     </p:spTree>
   </p:cSld>
   <p:clrMapOvr>
@@ -5990,30 +6278,47 @@
           <a:chExt cx="0" cy="0"/>
         </a:xfrm>
       </p:grpSpPr>
-      <p:pic>
-        <p:nvPicPr>
-          <p:cNvPr id="2" name="Image 0" descr="preencoded.png">    </p:cNvPr>
-          <p:cNvPicPr>
-            <a:picLocks noChangeAspect="1"/>
-          </p:cNvPicPr>
-          <p:nvPr/>
-        </p:nvPicPr>
-        <p:blipFill>
-          <a:blip r:embed="rId1"/>
-          <a:stretch>
-            <a:fillRect/>
-          </a:stretch>
-        </p:blipFill>
-        <p:spPr>
-          <a:xfrm>
-            <a:off x="2651760" y="640080"/>
-            <a:ext cx="3840480" cy="3840480"/>
-          </a:xfrm>
-          <a:prstGeom prst="rect">
-            <a:avLst/>
-          </a:prstGeom>
-        </p:spPr>
-      </p:pic>
+      <p:sp>
+        <p:nvSpPr>
+          <p:cNvPr id="2" name="Text 0"/>
+          <p:cNvSpPr/>
+          <p:nvPr/>
+        </p:nvSpPr>
+        <p:spPr>
+          <a:xfrm>
+            <a:off x="914400" y="1828800"/>
+            <a:ext cx="7315200" cy="1188720"/>
+          </a:xfrm>
+          <a:prstGeom prst="rect">
+            <a:avLst/>
+          </a:prstGeom>
+          <a:noFill/>
+          <a:ln/>
+        </p:spPr>
+        <p:txBody>
+          <a:bodyPr wrap="square" lIns="0" tIns="0" rIns="0" bIns="0" rtlCol="0" anchor="ctr">
+            <a:normAutofit/>
+          </a:bodyPr>
+          <a:lstStyle/>
+          <a:p>
+            <a:pPr algn="ctr" indent="0" marL="0">
+              <a:buNone/>
+            </a:pPr>
+            <a:r>
+              <a:rPr lang="en-US" sz="4400" b="1" dirty="0">
+                <a:solidFill>
+                  <a:srgbClr val="0B4F6C"/>
+                </a:solidFill>
+                <a:latin typeface="Verdana" pitchFamily="34" charset="0"/>
+                <a:ea typeface="Verdana" pitchFamily="34" charset="-122"/>
+                <a:cs typeface="Verdana" pitchFamily="34" charset="-120"/>
+              </a:rPr>
+              <a:t>Ball</a:t>
+            </a:r>
+            <a:endParaRPr lang="en-US" sz="4400" dirty="0"/>
+          </a:p>
+        </p:txBody>
+      </p:sp>
     </p:spTree>
   </p:cSld>
   <p:clrMapOvr>
@@ -6046,47 +6351,30 @@
           <a:chExt cx="0" cy="0"/>
         </a:xfrm>
       </p:grpSpPr>
-      <p:sp>
-        <p:nvSpPr>
-          <p:cNvPr id="2" name="Text 0"/>
-          <p:cNvSpPr/>
-          <p:nvPr/>
-        </p:nvSpPr>
-        <p:spPr>
-          <a:xfrm>
-            <a:off x="914400" y="1828800"/>
-            <a:ext cx="7315200" cy="1188720"/>
-          </a:xfrm>
-          <a:prstGeom prst="rect">
-            <a:avLst/>
-          </a:prstGeom>
-          <a:noFill/>
-          <a:ln/>
-        </p:spPr>
-        <p:txBody>
-          <a:bodyPr wrap="square" lIns="0" tIns="0" rIns="0" bIns="0" rtlCol="0" anchor="ctr">
-            <a:normAutofit/>
-          </a:bodyPr>
-          <a:lstStyle/>
-          <a:p>
-            <a:pPr algn="ctr" indent="0" marL="0">
-              <a:buNone/>
-            </a:pPr>
-            <a:r>
-              <a:rPr lang="en-US" sz="4400" b="1" dirty="0">
-                <a:solidFill>
-                  <a:srgbClr val="0B4F6C"/>
-                </a:solidFill>
-                <a:latin typeface="Verdana" pitchFamily="34" charset="0"/>
-                <a:ea typeface="Verdana" pitchFamily="34" charset="-122"/>
-                <a:cs typeface="Verdana" pitchFamily="34" charset="-120"/>
-              </a:rPr>
-              <a:t>Doll</a:t>
-            </a:r>
-            <a:endParaRPr lang="en-US" sz="4400" dirty="0"/>
-          </a:p>
-        </p:txBody>
-      </p:sp>
+      <p:pic>
+        <p:nvPicPr>
+          <p:cNvPr id="2" name="Image 0" descr="preencoded.png">    </p:cNvPr>
+          <p:cNvPicPr>
+            <a:picLocks noChangeAspect="1"/>
+          </p:cNvPicPr>
+          <p:nvPr/>
+        </p:nvPicPr>
+        <p:blipFill>
+          <a:blip r:embed="rId1"/>
+          <a:stretch>
+            <a:fillRect/>
+          </a:stretch>
+        </p:blipFill>
+        <p:spPr>
+          <a:xfrm>
+            <a:off x="2651760" y="640080"/>
+            <a:ext cx="3840480" cy="3840480"/>
+          </a:xfrm>
+          <a:prstGeom prst="rect">
+            <a:avLst/>
+          </a:prstGeom>
+        </p:spPr>
+      </p:pic>
     </p:spTree>
   </p:cSld>
   <p:clrMapOvr>
@@ -6119,30 +6407,47 @@
           <a:chExt cx="0" cy="0"/>
         </a:xfrm>
       </p:grpSpPr>
-      <p:pic>
-        <p:nvPicPr>
-          <p:cNvPr id="2" name="Image 0" descr="preencoded.png">    </p:cNvPr>
-          <p:cNvPicPr>
-            <a:picLocks noChangeAspect="1"/>
-          </p:cNvPicPr>
-          <p:nvPr/>
-        </p:nvPicPr>
-        <p:blipFill>
-          <a:blip r:embed="rId1"/>
-          <a:stretch>
-            <a:fillRect/>
-          </a:stretch>
-        </p:blipFill>
-        <p:spPr>
-          <a:xfrm>
-            <a:off x="2651760" y="640080"/>
-            <a:ext cx="3840480" cy="3840480"/>
-          </a:xfrm>
-          <a:prstGeom prst="rect">
-            <a:avLst/>
-          </a:prstGeom>
-        </p:spPr>
-      </p:pic>
+      <p:sp>
+        <p:nvSpPr>
+          <p:cNvPr id="2" name="Text 0"/>
+          <p:cNvSpPr/>
+          <p:nvPr/>
+        </p:nvSpPr>
+        <p:spPr>
+          <a:xfrm>
+            <a:off x="914400" y="1828800"/>
+            <a:ext cx="7315200" cy="1188720"/>
+          </a:xfrm>
+          <a:prstGeom prst="rect">
+            <a:avLst/>
+          </a:prstGeom>
+          <a:noFill/>
+          <a:ln/>
+        </p:spPr>
+        <p:txBody>
+          <a:bodyPr wrap="square" lIns="0" tIns="0" rIns="0" bIns="0" rtlCol="0" anchor="ctr">
+            <a:normAutofit/>
+          </a:bodyPr>
+          <a:lstStyle/>
+          <a:p>
+            <a:pPr algn="ctr" indent="0" marL="0">
+              <a:buNone/>
+            </a:pPr>
+            <a:r>
+              <a:rPr lang="en-US" sz="4400" b="1" dirty="0">
+                <a:solidFill>
+                  <a:srgbClr val="0B4F6C"/>
+                </a:solidFill>
+                <a:latin typeface="Verdana" pitchFamily="34" charset="0"/>
+                <a:ea typeface="Verdana" pitchFamily="34" charset="-122"/>
+                <a:cs typeface="Verdana" pitchFamily="34" charset="-120"/>
+              </a:rPr>
+              <a:t>Doll</a:t>
+            </a:r>
+            <a:endParaRPr lang="en-US" sz="4400" dirty="0"/>
+          </a:p>
+        </p:txBody>
+      </p:sp>
     </p:spTree>
   </p:cSld>
   <p:clrMapOvr>
@@ -6175,47 +6480,30 @@
           <a:chExt cx="0" cy="0"/>
         </a:xfrm>
       </p:grpSpPr>
-      <p:sp>
-        <p:nvSpPr>
-          <p:cNvPr id="2" name="Text 0"/>
-          <p:cNvSpPr/>
-          <p:nvPr/>
-        </p:nvSpPr>
-        <p:spPr>
-          <a:xfrm>
-            <a:off x="914400" y="1828800"/>
-            <a:ext cx="7315200" cy="1188720"/>
-          </a:xfrm>
-          <a:prstGeom prst="rect">
-            <a:avLst/>
-          </a:prstGeom>
-          <a:noFill/>
-          <a:ln/>
-        </p:spPr>
-        <p:txBody>
-          <a:bodyPr wrap="square" lIns="0" tIns="0" rIns="0" bIns="0" rtlCol="0" anchor="ctr">
-            <a:normAutofit/>
-          </a:bodyPr>
-          <a:lstStyle/>
-          <a:p>
-            <a:pPr algn="ctr" indent="0" marL="0">
-              <a:buNone/>
-            </a:pPr>
-            <a:r>
-              <a:rPr lang="en-US" sz="4400" b="1" dirty="0">
-                <a:solidFill>
-                  <a:srgbClr val="0B4F6C"/>
-                </a:solidFill>
-                <a:latin typeface="Verdana" pitchFamily="34" charset="0"/>
-                <a:ea typeface="Verdana" pitchFamily="34" charset="-122"/>
-                <a:cs typeface="Verdana" pitchFamily="34" charset="-120"/>
-              </a:rPr>
-              <a:t>Car</a:t>
-            </a:r>
-            <a:endParaRPr lang="en-US" sz="4400" dirty="0"/>
-          </a:p>
-        </p:txBody>
-      </p:sp>
+      <p:pic>
+        <p:nvPicPr>
+          <p:cNvPr id="2" name="Image 0" descr="preencoded.png">    </p:cNvPr>
+          <p:cNvPicPr>
+            <a:picLocks noChangeAspect="1"/>
+          </p:cNvPicPr>
+          <p:nvPr/>
+        </p:nvPicPr>
+        <p:blipFill>
+          <a:blip r:embed="rId1"/>
+          <a:stretch>
+            <a:fillRect/>
+          </a:stretch>
+        </p:blipFill>
+        <p:spPr>
+          <a:xfrm>
+            <a:off x="2651760" y="640080"/>
+            <a:ext cx="3840480" cy="3840480"/>
+          </a:xfrm>
+          <a:prstGeom prst="rect">
+            <a:avLst/>
+          </a:prstGeom>
+        </p:spPr>
+      </p:pic>
     </p:spTree>
   </p:cSld>
   <p:clrMapOvr>
@@ -6248,30 +6536,47 @@
           <a:chExt cx="0" cy="0"/>
         </a:xfrm>
       </p:grpSpPr>
-      <p:pic>
-        <p:nvPicPr>
-          <p:cNvPr id="2" name="Image 0" descr="preencoded.png">    </p:cNvPr>
-          <p:cNvPicPr>
-            <a:picLocks noChangeAspect="1"/>
-          </p:cNvPicPr>
-          <p:nvPr/>
-        </p:nvPicPr>
-        <p:blipFill>
-          <a:blip r:embed="rId1"/>
-          <a:stretch>
-            <a:fillRect/>
-          </a:stretch>
-        </p:blipFill>
-        <p:spPr>
-          <a:xfrm>
-            <a:off x="2651760" y="640080"/>
-            <a:ext cx="3840480" cy="3840480"/>
-          </a:xfrm>
-          <a:prstGeom prst="rect">
-            <a:avLst/>
-          </a:prstGeom>
-        </p:spPr>
-      </p:pic>
+      <p:sp>
+        <p:nvSpPr>
+          <p:cNvPr id="2" name="Text 0"/>
+          <p:cNvSpPr/>
+          <p:nvPr/>
+        </p:nvSpPr>
+        <p:spPr>
+          <a:xfrm>
+            <a:off x="914400" y="1828800"/>
+            <a:ext cx="7315200" cy="1188720"/>
+          </a:xfrm>
+          <a:prstGeom prst="rect">
+            <a:avLst/>
+          </a:prstGeom>
+          <a:noFill/>
+          <a:ln/>
+        </p:spPr>
+        <p:txBody>
+          <a:bodyPr wrap="square" lIns="0" tIns="0" rIns="0" bIns="0" rtlCol="0" anchor="ctr">
+            <a:normAutofit/>
+          </a:bodyPr>
+          <a:lstStyle/>
+          <a:p>
+            <a:pPr algn="ctr" indent="0" marL="0">
+              <a:buNone/>
+            </a:pPr>
+            <a:r>
+              <a:rPr lang="en-US" sz="4400" b="1" dirty="0">
+                <a:solidFill>
+                  <a:srgbClr val="0B4F6C"/>
+                </a:solidFill>
+                <a:latin typeface="Verdana" pitchFamily="34" charset="0"/>
+                <a:ea typeface="Verdana" pitchFamily="34" charset="-122"/>
+                <a:cs typeface="Verdana" pitchFamily="34" charset="-120"/>
+              </a:rPr>
+              <a:t>Car</a:t>
+            </a:r>
+            <a:endParaRPr lang="en-US" sz="4400" dirty="0"/>
+          </a:p>
+        </p:txBody>
+      </p:sp>
     </p:spTree>
   </p:cSld>
   <p:clrMapOvr>
@@ -6304,47 +6609,30 @@
           <a:chExt cx="0" cy="0"/>
         </a:xfrm>
       </p:grpSpPr>
-      <p:sp>
-        <p:nvSpPr>
-          <p:cNvPr id="2" name="Text 0"/>
-          <p:cNvSpPr/>
-          <p:nvPr/>
-        </p:nvSpPr>
-        <p:spPr>
-          <a:xfrm>
-            <a:off x="914400" y="1828800"/>
-            <a:ext cx="7315200" cy="1188720"/>
-          </a:xfrm>
-          <a:prstGeom prst="rect">
-            <a:avLst/>
-          </a:prstGeom>
-          <a:noFill/>
-          <a:ln/>
-        </p:spPr>
-        <p:txBody>
-          <a:bodyPr wrap="square" lIns="0" tIns="0" rIns="0" bIns="0" rtlCol="0" anchor="ctr">
-            <a:normAutofit/>
-          </a:bodyPr>
-          <a:lstStyle/>
-          <a:p>
-            <a:pPr algn="ctr" indent="0" marL="0">
-              <a:buNone/>
-            </a:pPr>
-            <a:r>
-              <a:rPr lang="en-US" sz="4400" b="1" dirty="0">
-                <a:solidFill>
-                  <a:srgbClr val="0B4F6C"/>
-                </a:solidFill>
-                <a:latin typeface="Verdana" pitchFamily="34" charset="0"/>
-                <a:ea typeface="Verdana" pitchFamily="34" charset="-122"/>
-                <a:cs typeface="Verdana" pitchFamily="34" charset="-120"/>
-              </a:rPr>
-              <a:t>Train</a:t>
-            </a:r>
-            <a:endParaRPr lang="en-US" sz="4400" dirty="0"/>
-          </a:p>
-        </p:txBody>
-      </p:sp>
+      <p:pic>
+        <p:nvPicPr>
+          <p:cNvPr id="2" name="Image 0" descr="preencoded.png">    </p:cNvPr>
+          <p:cNvPicPr>
+            <a:picLocks noChangeAspect="1"/>
+          </p:cNvPicPr>
+          <p:nvPr/>
+        </p:nvPicPr>
+        <p:blipFill>
+          <a:blip r:embed="rId1"/>
+          <a:stretch>
+            <a:fillRect/>
+          </a:stretch>
+        </p:blipFill>
+        <p:spPr>
+          <a:xfrm>
+            <a:off x="2651760" y="640080"/>
+            <a:ext cx="3840480" cy="3840480"/>
+          </a:xfrm>
+          <a:prstGeom prst="rect">
+            <a:avLst/>
+          </a:prstGeom>
+        </p:spPr>
+      </p:pic>
     </p:spTree>
   </p:cSld>
   <p:clrMapOvr>
@@ -6377,30 +6665,47 @@
           <a:chExt cx="0" cy="0"/>
         </a:xfrm>
       </p:grpSpPr>
-      <p:pic>
-        <p:nvPicPr>
-          <p:cNvPr id="2" name="Image 0" descr="preencoded.png">    </p:cNvPr>
-          <p:cNvPicPr>
-            <a:picLocks noChangeAspect="1"/>
-          </p:cNvPicPr>
-          <p:nvPr/>
-        </p:nvPicPr>
-        <p:blipFill>
-          <a:blip r:embed="rId1"/>
-          <a:stretch>
-            <a:fillRect/>
-          </a:stretch>
-        </p:blipFill>
-        <p:spPr>
-          <a:xfrm>
-            <a:off x="2651760" y="640080"/>
-            <a:ext cx="3840480" cy="3840480"/>
-          </a:xfrm>
-          <a:prstGeom prst="rect">
-            <a:avLst/>
-          </a:prstGeom>
-        </p:spPr>
-      </p:pic>
+      <p:sp>
+        <p:nvSpPr>
+          <p:cNvPr id="2" name="Text 0"/>
+          <p:cNvSpPr/>
+          <p:nvPr/>
+        </p:nvSpPr>
+        <p:spPr>
+          <a:xfrm>
+            <a:off x="914400" y="1828800"/>
+            <a:ext cx="7315200" cy="1188720"/>
+          </a:xfrm>
+          <a:prstGeom prst="rect">
+            <a:avLst/>
+          </a:prstGeom>
+          <a:noFill/>
+          <a:ln/>
+        </p:spPr>
+        <p:txBody>
+          <a:bodyPr wrap="square" lIns="0" tIns="0" rIns="0" bIns="0" rtlCol="0" anchor="ctr">
+            <a:normAutofit/>
+          </a:bodyPr>
+          <a:lstStyle/>
+          <a:p>
+            <a:pPr algn="ctr" indent="0" marL="0">
+              <a:buNone/>
+            </a:pPr>
+            <a:r>
+              <a:rPr lang="en-US" sz="4400" b="1" dirty="0">
+                <a:solidFill>
+                  <a:srgbClr val="0B4F6C"/>
+                </a:solidFill>
+                <a:latin typeface="Verdana" pitchFamily="34" charset="0"/>
+                <a:ea typeface="Verdana" pitchFamily="34" charset="-122"/>
+                <a:cs typeface="Verdana" pitchFamily="34" charset="-120"/>
+              </a:rPr>
+              <a:t>Train</a:t>
+            </a:r>
+            <a:endParaRPr lang="en-US" sz="4400" dirty="0"/>
+          </a:p>
+        </p:txBody>
+      </p:sp>
     </p:spTree>
   </p:cSld>
   <p:clrMapOvr>
@@ -6433,6 +6738,62 @@
           <a:chExt cx="0" cy="0"/>
         </a:xfrm>
       </p:grpSpPr>
+      <p:pic>
+        <p:nvPicPr>
+          <p:cNvPr id="2" name="Image 0" descr="preencoded.png">    </p:cNvPr>
+          <p:cNvPicPr>
+            <a:picLocks noChangeAspect="1"/>
+          </p:cNvPicPr>
+          <p:nvPr/>
+        </p:nvPicPr>
+        <p:blipFill>
+          <a:blip r:embed="rId1"/>
+          <a:stretch>
+            <a:fillRect/>
+          </a:stretch>
+        </p:blipFill>
+        <p:spPr>
+          <a:xfrm>
+            <a:off x="2651760" y="640080"/>
+            <a:ext cx="3840480" cy="3840480"/>
+          </a:xfrm>
+          <a:prstGeom prst="rect">
+            <a:avLst/>
+          </a:prstGeom>
+        </p:spPr>
+      </p:pic>
+    </p:spTree>
+  </p:cSld>
+  <p:clrMapOvr>
+    <a:masterClrMapping/>
+  </p:clrMapOvr>
+</p:sld>
+</file>
+
+<file path=ppt/slides/slide28.xml><?xml version="1.0" encoding="utf-8"?>
+<p:sld xmlns:a="http://schemas.openxmlformats.org/drawingml/2006/main" xmlns:r="http://schemas.openxmlformats.org/officeDocument/2006/relationships" xmlns:p="http://schemas.openxmlformats.org/presentationml/2006/main">
+  <p:cSld name="Slide 28">
+    <p:bg>
+      <p:bgPr>
+        <a:solidFill>
+          <a:srgbClr val="FFFFFF"/>
+        </a:solidFill>
+      </p:bgPr>
+    </p:bg>
+    <p:spTree>
+      <p:nvGrpSpPr>
+        <p:cNvPr id="1" name=""/>
+        <p:cNvGrpSpPr/>
+        <p:nvPr/>
+      </p:nvGrpSpPr>
+      <p:grpSpPr>
+        <a:xfrm>
+          <a:off x="0" y="0"/>
+          <a:ext cx="0" cy="0"/>
+          <a:chOff x="0" y="0"/>
+          <a:chExt cx="0" cy="0"/>
+        </a:xfrm>
+      </p:grpSpPr>
       <p:sp>
         <p:nvSpPr>
           <p:cNvPr id="2" name="Text 0"/>
@@ -6833,7 +7194,7 @@
                 <a:ea typeface="Trebuchet MS" pitchFamily="34" charset="-122"/>
                 <a:cs typeface="Trebuchet MS" pitchFamily="34" charset="-120"/>
               </a:rPr>
-              <a:t>Ball</a:t>
+              <a:t>Look and discuss</a:t>
             </a:r>
             <a:endParaRPr lang="en-US" sz="3600" dirty="0"/>
           </a:p>
@@ -6848,7 +7209,7 @@
         <p:spPr>
           <a:xfrm>
             <a:off x="502920" y="1234440"/>
-            <a:ext cx="4475988" cy="2583180"/>
+            <a:ext cx="4557370" cy="3406140"/>
           </a:xfrm>
           <a:prstGeom prst="rect">
             <a:avLst/>
@@ -6872,8 +7233,8 @@
         </p:nvSpPr>
         <p:spPr>
           <a:xfrm>
-            <a:off x="777240" y="1399032"/>
-            <a:ext cx="3927348" cy="685800"/>
+            <a:off x="777240" y="1435608"/>
+            <a:ext cx="4008730" cy="3003804"/>
           </a:xfrm>
           <a:prstGeom prst="rect">
             <a:avLst/>
@@ -6882,57 +7243,22 @@
           <a:ln/>
         </p:spPr>
         <p:txBody>
-          <a:bodyPr wrap="square" rtlCol="0" anchor="ctr">
+          <a:bodyPr wrap="square" lIns="0" tIns="0" rIns="0" bIns="0" rtlCol="0" anchor="t">
             <a:normAutofit/>
           </a:bodyPr>
           <a:lstStyle/>
           <a:p>
-            <a:pPr indent="0" marL="0">
+            <a:pPr algn="just" indent="0" marL="0">
+              <a:lnSpc>
+                <a:spcPct val="115000"/>
+              </a:lnSpc>
+              <a:spcAft>
+                <a:spcPts val="1200"/>
+              </a:spcAft>
               <a:buNone/>
             </a:pPr>
             <a:r>
-              <a:rPr lang="en-US" sz="3400" b="1" dirty="0">
-                <a:solidFill>
-                  <a:srgbClr val="D62828"/>
-                </a:solidFill>
-                <a:latin typeface="Trebuchet MS" pitchFamily="34" charset="0"/>
-                <a:ea typeface="Trebuchet MS" pitchFamily="34" charset="-122"/>
-                <a:cs typeface="Trebuchet MS" pitchFamily="34" charset="-120"/>
-              </a:rPr>
-              <a:t>Ball</a:t>
-            </a:r>
-            <a:endParaRPr lang="en-US" sz="3400" dirty="0"/>
-          </a:p>
-        </p:txBody>
-      </p:sp>
-      <p:sp>
-        <p:nvSpPr>
-          <p:cNvPr id="6" name="Text 4"/>
-          <p:cNvSpPr/>
-          <p:nvPr/>
-        </p:nvSpPr>
-        <p:spPr>
-          <a:xfrm>
-            <a:off x="777240" y="2148840"/>
-            <a:ext cx="3927348" cy="845820"/>
-          </a:xfrm>
-          <a:prstGeom prst="rect">
-            <a:avLst/>
-          </a:prstGeom>
-          <a:noFill/>
-          <a:ln/>
-        </p:spPr>
-        <p:txBody>
-          <a:bodyPr wrap="square" rtlCol="0" anchor="t">
-            <a:normAutofit/>
-          </a:bodyPr>
-          <a:lstStyle/>
-          <a:p>
-            <a:pPr algn="just" indent="0" marL="0">
-              <a:buNone/>
-            </a:pPr>
-            <a:r>
-              <a:rPr lang="en-US" sz="2200" dirty="0">
+              <a:rPr lang="en-US" sz="2400" dirty="0">
                 <a:solidFill>
                   <a:srgbClr val="20303A"/>
                 </a:solidFill>
@@ -6940,56 +7266,38 @@
                 <a:ea typeface="Verdana" pitchFamily="34" charset="-122"/>
                 <a:cs typeface="Verdana" pitchFamily="34" charset="-120"/>
               </a:rPr>
-              <a:t>A round toy you can roll.</a:t>
-            </a:r>
-            <a:endParaRPr lang="en-US" sz="2200" dirty="0"/>
-          </a:p>
-        </p:txBody>
-      </p:sp>
-      <p:sp>
-        <p:nvSpPr>
-          <p:cNvPr id="7" name="Text 5"/>
-          <p:cNvSpPr/>
-          <p:nvPr/>
-        </p:nvSpPr>
-        <p:spPr>
-          <a:xfrm>
-            <a:off x="777240" y="3040380"/>
-            <a:ext cx="3927348" cy="594360"/>
-          </a:xfrm>
-          <a:prstGeom prst="rect">
-            <a:avLst/>
-          </a:prstGeom>
-          <a:noFill/>
-          <a:ln/>
-        </p:spPr>
-        <p:txBody>
-          <a:bodyPr wrap="square" rtlCol="0" anchor="ctr">
-            <a:normAutofit/>
-          </a:bodyPr>
-          <a:lstStyle/>
+              <a:t>Name three toys.</a:t>
+            </a:r>
+            <a:endParaRPr lang="en-US" sz="2400" dirty="0"/>
+          </a:p>
           <a:p>
             <a:pPr algn="just" indent="0" marL="0">
+              <a:lnSpc>
+                <a:spcPct val="115000"/>
+              </a:lnSpc>
+              <a:spcAft>
+                <a:spcPts val="1200"/>
+              </a:spcAft>
               <a:buNone/>
             </a:pPr>
             <a:r>
-              <a:rPr lang="en-US" sz="1500" i="1" dirty="0">
+              <a:rPr lang="en-US" sz="2400" dirty="0">
                 <a:solidFill>
-                  <a:srgbClr val="5B7280"/>
+                  <a:srgbClr val="20303A"/>
                 </a:solidFill>
                 <a:latin typeface="Verdana" pitchFamily="34" charset="0"/>
                 <a:ea typeface="Verdana" pitchFamily="34" charset="-122"/>
                 <a:cs typeface="Verdana" pitchFamily="34" charset="-120"/>
               </a:rPr>
-              <a:t>"I have a ball."</a:t>
-            </a:r>
-            <a:endParaRPr lang="en-US" sz="1500" dirty="0"/>
+              <a:t>Ask your partner for one toy politely.</a:t>
+            </a:r>
+            <a:endParaRPr lang="en-US" sz="2400" dirty="0"/>
           </a:p>
         </p:txBody>
       </p:sp>
       <p:pic>
         <p:nvPicPr>
-          <p:cNvPr id="8" name="Image 0" descr="preencoded.png">    </p:cNvPr>
+          <p:cNvPr id="6" name="Image 0" descr="preencoded.png">    </p:cNvPr>
           <p:cNvPicPr>
             <a:picLocks noChangeAspect="1"/>
           </p:cNvPicPr>
@@ -7003,8 +7311,8 @@
         </p:blipFill>
         <p:spPr>
           <a:xfrm>
-            <a:off x="5655564" y="1234440"/>
-            <a:ext cx="2583180" cy="2583180"/>
+            <a:off x="5334610" y="1835353"/>
+            <a:ext cx="3306470" cy="2204314"/>
           </a:xfrm>
           <a:prstGeom prst="rect">
             <a:avLst/>
@@ -7013,75 +7321,7 @@
       </p:pic>
       <p:sp>
         <p:nvSpPr>
-          <p:cNvPr id="9" name="Shape 6"/>
-          <p:cNvSpPr/>
-          <p:nvPr/>
-        </p:nvSpPr>
-        <p:spPr>
-          <a:xfrm>
-            <a:off x="502920" y="3973068"/>
-            <a:ext cx="8138160" cy="731520"/>
-          </a:xfrm>
-          <a:prstGeom prst="roundRect">
-            <a:avLst>
-              <a:gd name="adj" fmla="val 10000"/>
-            </a:avLst>
-          </a:prstGeom>
-          <a:solidFill>
-            <a:srgbClr val="FFF3D6"/>
-          </a:solidFill>
-          <a:ln w="12700">
-            <a:solidFill>
-              <a:srgbClr val="F4A300"/>
-            </a:solidFill>
-            <a:prstDash val="solid"/>
-          </a:ln>
-        </p:spPr>
-      </p:sp>
-      <p:sp>
-        <p:nvSpPr>
-          <p:cNvPr id="10" name="Text 7"/>
-          <p:cNvSpPr/>
-          <p:nvPr/>
-        </p:nvSpPr>
-        <p:spPr>
-          <a:xfrm>
-            <a:off x="685800" y="4027932"/>
-            <a:ext cx="7772400" cy="621792"/>
-          </a:xfrm>
-          <a:prstGeom prst="rect">
-            <a:avLst/>
-          </a:prstGeom>
-          <a:noFill/>
-          <a:ln/>
-        </p:spPr>
-        <p:txBody>
-          <a:bodyPr wrap="square" rtlCol="0" anchor="ctr">
-            <a:normAutofit/>
-          </a:bodyPr>
-          <a:lstStyle/>
-          <a:p>
-            <a:pPr algn="just" indent="0" marL="0">
-              <a:buNone/>
-            </a:pPr>
-            <a:r>
-              <a:rPr lang="en-US" sz="1500" b="1" dirty="0">
-                <a:solidFill>
-                  <a:srgbClr val="0B4F6C"/>
-                </a:solidFill>
-                <a:latin typeface="Verdana" pitchFamily="34" charset="0"/>
-                <a:ea typeface="Verdana" pitchFamily="34" charset="-122"/>
-                <a:cs typeface="Verdana" pitchFamily="34" charset="-120"/>
-              </a:rPr>
-              <a:t>Say the word.</a:t>
-            </a:r>
-            <a:endParaRPr lang="en-US" sz="1500" dirty="0"/>
-          </a:p>
-        </p:txBody>
-      </p:sp>
-      <p:sp>
-        <p:nvSpPr>
-          <p:cNvPr id="11" name="Text 8"/>
+          <p:cNvPr id="7" name="Text 4"/>
           <p:cNvSpPr/>
           <p:nvPr/>
         </p:nvSpPr>
@@ -7205,7 +7445,7 @@
                 <a:ea typeface="Trebuchet MS" pitchFamily="34" charset="-122"/>
                 <a:cs typeface="Trebuchet MS" pitchFamily="34" charset="-120"/>
               </a:rPr>
-              <a:t>Doll</a:t>
+              <a:t>Ball</a:t>
             </a:r>
             <a:endParaRPr lang="en-US" sz="3600" dirty="0"/>
           </a:p>
@@ -7271,7 +7511,7 @@
                 <a:ea typeface="Trebuchet MS" pitchFamily="34" charset="-122"/>
                 <a:cs typeface="Trebuchet MS" pitchFamily="34" charset="-120"/>
               </a:rPr>
-              <a:t>Doll</a:t>
+              <a:t>Ball</a:t>
             </a:r>
             <a:endParaRPr lang="en-US" sz="3400" dirty="0"/>
           </a:p>
@@ -7312,7 +7552,7 @@
                 <a:ea typeface="Verdana" pitchFamily="34" charset="-122"/>
                 <a:cs typeface="Verdana" pitchFamily="34" charset="-120"/>
               </a:rPr>
-              <a:t>A toy that looks like a person.</a:t>
+              <a:t>A round toy you can roll.</a:t>
             </a:r>
             <a:endParaRPr lang="en-US" sz="2200" dirty="0"/>
           </a:p>
@@ -7353,7 +7593,7 @@
                 <a:ea typeface="Verdana" pitchFamily="34" charset="-122"/>
                 <a:cs typeface="Verdana" pitchFamily="34" charset="-120"/>
               </a:rPr>
-              <a:t>"I want the doll, please."</a:t>
+              <a:t>"I have a ball."</a:t>
             </a:r>
             <a:endParaRPr lang="en-US" sz="1500" dirty="0"/>
           </a:p>
@@ -7577,7 +7817,7 @@
                 <a:ea typeface="Trebuchet MS" pitchFamily="34" charset="-122"/>
                 <a:cs typeface="Trebuchet MS" pitchFamily="34" charset="-120"/>
               </a:rPr>
-              <a:t>Car</a:t>
+              <a:t>Doll</a:t>
             </a:r>
             <a:endParaRPr lang="en-US" sz="3600" dirty="0"/>
           </a:p>
@@ -7643,7 +7883,7 @@
                 <a:ea typeface="Trebuchet MS" pitchFamily="34" charset="-122"/>
                 <a:cs typeface="Trebuchet MS" pitchFamily="34" charset="-120"/>
               </a:rPr>
-              <a:t>Car</a:t>
+              <a:t>Doll</a:t>
             </a:r>
             <a:endParaRPr lang="en-US" sz="3400" dirty="0"/>
           </a:p>
@@ -7684,7 +7924,7 @@
                 <a:ea typeface="Verdana" pitchFamily="34" charset="-122"/>
                 <a:cs typeface="Verdana" pitchFamily="34" charset="-120"/>
               </a:rPr>
-              <a:t>A small toy vehicle with wheels.</a:t>
+              <a:t>A toy that looks like a person.</a:t>
             </a:r>
             <a:endParaRPr lang="en-US" sz="2200" dirty="0"/>
           </a:p>
@@ -7725,7 +7965,7 @@
                 <a:ea typeface="Verdana" pitchFamily="34" charset="-122"/>
                 <a:cs typeface="Verdana" pitchFamily="34" charset="-120"/>
               </a:rPr>
-              <a:t>"Do you have a toy car?"</a:t>
+              <a:t>"I want the doll, please."</a:t>
             </a:r>
             <a:endParaRPr lang="en-US" sz="1500" dirty="0"/>
           </a:p>
@@ -7949,7 +8189,7 @@
                 <a:ea typeface="Trebuchet MS" pitchFamily="34" charset="-122"/>
                 <a:cs typeface="Trebuchet MS" pitchFamily="34" charset="-120"/>
               </a:rPr>
-              <a:t>Train</a:t>
+              <a:t>Car</a:t>
             </a:r>
             <a:endParaRPr lang="en-US" sz="3600" dirty="0"/>
           </a:p>
@@ -8015,7 +8255,7 @@
                 <a:ea typeface="Trebuchet MS" pitchFamily="34" charset="-122"/>
                 <a:cs typeface="Trebuchet MS" pitchFamily="34" charset="-120"/>
               </a:rPr>
-              <a:t>Train</a:t>
+              <a:t>Car</a:t>
             </a:r>
             <a:endParaRPr lang="en-US" sz="3400" dirty="0"/>
           </a:p>
@@ -8056,7 +8296,7 @@
                 <a:ea typeface="Verdana" pitchFamily="34" charset="-122"/>
                 <a:cs typeface="Verdana" pitchFamily="34" charset="-120"/>
               </a:rPr>
-              <a:t>A toy vehicle that runs on tracks.</a:t>
+              <a:t>A small toy vehicle with wheels.</a:t>
             </a:r>
             <a:endParaRPr lang="en-US" sz="2200" dirty="0"/>
           </a:p>
@@ -8097,7 +8337,7 @@
                 <a:ea typeface="Verdana" pitchFamily="34" charset="-122"/>
                 <a:cs typeface="Verdana" pitchFamily="34" charset="-120"/>
               </a:rPr>
-              <a:t>"It is a train."</a:t>
+              <a:t>"Do you have a toy car?"</a:t>
             </a:r>
             <a:endParaRPr lang="en-US" sz="1500" dirty="0"/>
           </a:p>
@@ -8321,7 +8561,7 @@
                 <a:ea typeface="Trebuchet MS" pitchFamily="34" charset="-122"/>
                 <a:cs typeface="Trebuchet MS" pitchFamily="34" charset="-120"/>
               </a:rPr>
-              <a:t>Teddy</a:t>
+              <a:t>Train</a:t>
             </a:r>
             <a:endParaRPr lang="en-US" sz="3600" dirty="0"/>
           </a:p>
@@ -8387,7 +8627,7 @@
                 <a:ea typeface="Trebuchet MS" pitchFamily="34" charset="-122"/>
                 <a:cs typeface="Trebuchet MS" pitchFamily="34" charset="-120"/>
               </a:rPr>
-              <a:t>Teddy</a:t>
+              <a:t>Train</a:t>
             </a:r>
             <a:endParaRPr lang="en-US" sz="3400" dirty="0"/>
           </a:p>
@@ -8428,7 +8668,7 @@
                 <a:ea typeface="Verdana" pitchFamily="34" charset="-122"/>
                 <a:cs typeface="Verdana" pitchFamily="34" charset="-120"/>
               </a:rPr>
-              <a:t>A soft toy bear.</a:t>
+              <a:t>A toy vehicle that runs on tracks.</a:t>
             </a:r>
             <a:endParaRPr lang="en-US" sz="2200" dirty="0"/>
           </a:p>
@@ -8469,7 +8709,7 @@
                 <a:ea typeface="Verdana" pitchFamily="34" charset="-122"/>
                 <a:cs typeface="Verdana" pitchFamily="34" charset="-120"/>
               </a:rPr>
-              <a:t>"Can I have the teddy, please?"</a:t>
+              <a:t>"It is a train."</a:t>
             </a:r>
             <a:endParaRPr lang="en-US" sz="1500" dirty="0"/>
           </a:p>
@@ -8693,7 +8933,7 @@
                 <a:ea typeface="Trebuchet MS" pitchFamily="34" charset="-122"/>
                 <a:cs typeface="Trebuchet MS" pitchFamily="34" charset="-120"/>
               </a:rPr>
-              <a:t>Read and notice</a:t>
+              <a:t>Teddy</a:t>
             </a:r>
             <a:endParaRPr lang="en-US" sz="3600" dirty="0"/>
           </a:p>
@@ -8708,7 +8948,7 @@
         <p:spPr>
           <a:xfrm>
             <a:off x="502920" y="1234440"/>
-            <a:ext cx="8138160" cy="2583180"/>
+            <a:ext cx="4475988" cy="2583180"/>
           </a:xfrm>
           <a:prstGeom prst="rect">
             <a:avLst/>
@@ -8732,8 +8972,8 @@
         </p:nvSpPr>
         <p:spPr>
           <a:xfrm>
-            <a:off x="777240" y="1435608"/>
-            <a:ext cx="7589520" cy="2180844"/>
+            <a:off x="777240" y="1399032"/>
+            <a:ext cx="3927348" cy="685800"/>
           </a:xfrm>
           <a:prstGeom prst="rect">
             <a:avLst/>
@@ -8742,22 +8982,57 @@
           <a:ln/>
         </p:spPr>
         <p:txBody>
-          <a:bodyPr wrap="square" lIns="0" tIns="0" rIns="0" bIns="0" rtlCol="0" anchor="t">
+          <a:bodyPr wrap="square" rtlCol="0" anchor="ctr">
             <a:normAutofit/>
           </a:bodyPr>
           <a:lstStyle/>
           <a:p>
-            <a:pPr algn="just" indent="0" marL="0">
-              <a:lnSpc>
-                <a:spcPct val="115000"/>
-              </a:lnSpc>
-              <a:spcAft>
-                <a:spcPts val="1200"/>
-              </a:spcAft>
+            <a:pPr indent="0" marL="0">
               <a:buNone/>
             </a:pPr>
             <a:r>
-              <a:rPr lang="en-US" sz="2400" dirty="0">
+              <a:rPr lang="en-US" sz="3400" b="1" dirty="0">
+                <a:solidFill>
+                  <a:srgbClr val="D62828"/>
+                </a:solidFill>
+                <a:latin typeface="Trebuchet MS" pitchFamily="34" charset="0"/>
+                <a:ea typeface="Trebuchet MS" pitchFamily="34" charset="-122"/>
+                <a:cs typeface="Trebuchet MS" pitchFamily="34" charset="-120"/>
+              </a:rPr>
+              <a:t>Teddy</a:t>
+            </a:r>
+            <a:endParaRPr lang="en-US" sz="3400" dirty="0"/>
+          </a:p>
+        </p:txBody>
+      </p:sp>
+      <p:sp>
+        <p:nvSpPr>
+          <p:cNvPr id="6" name="Text 4"/>
+          <p:cNvSpPr/>
+          <p:nvPr/>
+        </p:nvSpPr>
+        <p:spPr>
+          <a:xfrm>
+            <a:off x="777240" y="2148840"/>
+            <a:ext cx="3927348" cy="845820"/>
+          </a:xfrm>
+          <a:prstGeom prst="rect">
+            <a:avLst/>
+          </a:prstGeom>
+          <a:noFill/>
+          <a:ln/>
+        </p:spPr>
+        <p:txBody>
+          <a:bodyPr wrap="square" rtlCol="0" anchor="t">
+            <a:normAutofit/>
+          </a:bodyPr>
+          <a:lstStyle/>
+          <a:p>
+            <a:pPr algn="just" indent="0" marL="0">
+              <a:buNone/>
+            </a:pPr>
+            <a:r>
+              <a:rPr lang="en-US" sz="2200" dirty="0">
                 <a:solidFill>
                   <a:srgbClr val="20303A"/>
                 </a:solidFill>
@@ -8765,15 +9040,80 @@
                 <a:ea typeface="Verdana" pitchFamily="34" charset="-122"/>
                 <a:cs typeface="Verdana" pitchFamily="34" charset="-120"/>
               </a:rPr>
-              <a:t>The Toy Swap</a:t>
-            </a:r>
-            <a:endParaRPr lang="en-US" sz="2400" dirty="0"/>
-          </a:p>
-        </p:txBody>
-      </p:sp>
-      <p:sp>
-        <p:nvSpPr>
-          <p:cNvPr id="6" name="Shape 4"/>
+              <a:t>A soft toy bear.</a:t>
+            </a:r>
+            <a:endParaRPr lang="en-US" sz="2200" dirty="0"/>
+          </a:p>
+        </p:txBody>
+      </p:sp>
+      <p:sp>
+        <p:nvSpPr>
+          <p:cNvPr id="7" name="Text 5"/>
+          <p:cNvSpPr/>
+          <p:nvPr/>
+        </p:nvSpPr>
+        <p:spPr>
+          <a:xfrm>
+            <a:off x="777240" y="3040380"/>
+            <a:ext cx="3927348" cy="594360"/>
+          </a:xfrm>
+          <a:prstGeom prst="rect">
+            <a:avLst/>
+          </a:prstGeom>
+          <a:noFill/>
+          <a:ln/>
+        </p:spPr>
+        <p:txBody>
+          <a:bodyPr wrap="square" rtlCol="0" anchor="ctr">
+            <a:normAutofit/>
+          </a:bodyPr>
+          <a:lstStyle/>
+          <a:p>
+            <a:pPr algn="just" indent="0" marL="0">
+              <a:buNone/>
+            </a:pPr>
+            <a:r>
+              <a:rPr lang="en-US" sz="1500" i="1" dirty="0">
+                <a:solidFill>
+                  <a:srgbClr val="5B7280"/>
+                </a:solidFill>
+                <a:latin typeface="Verdana" pitchFamily="34" charset="0"/>
+                <a:ea typeface="Verdana" pitchFamily="34" charset="-122"/>
+                <a:cs typeface="Verdana" pitchFamily="34" charset="-120"/>
+              </a:rPr>
+              <a:t>"Can I have the teddy, please?"</a:t>
+            </a:r>
+            <a:endParaRPr lang="en-US" sz="1500" dirty="0"/>
+          </a:p>
+        </p:txBody>
+      </p:sp>
+      <p:pic>
+        <p:nvPicPr>
+          <p:cNvPr id="8" name="Image 0" descr="preencoded.png">    </p:cNvPr>
+          <p:cNvPicPr>
+            <a:picLocks noChangeAspect="1"/>
+          </p:cNvPicPr>
+          <p:nvPr/>
+        </p:nvPicPr>
+        <p:blipFill>
+          <a:blip r:embed="rId1"/>
+          <a:stretch>
+            <a:fillRect/>
+          </a:stretch>
+        </p:blipFill>
+        <p:spPr>
+          <a:xfrm>
+            <a:off x="5655564" y="1234440"/>
+            <a:ext cx="2583180" cy="2583180"/>
+          </a:xfrm>
+          <a:prstGeom prst="rect">
+            <a:avLst/>
+          </a:prstGeom>
+        </p:spPr>
+      </p:pic>
+      <p:sp>
+        <p:nvSpPr>
+          <p:cNvPr id="9" name="Shape 6"/>
           <p:cNvSpPr/>
           <p:nvPr/>
         </p:nvSpPr>
@@ -8800,7 +9140,7 @@
       </p:sp>
       <p:sp>
         <p:nvSpPr>
-          <p:cNvPr id="7" name="Text 5"/>
+          <p:cNvPr id="10" name="Text 7"/>
           <p:cNvSpPr/>
           <p:nvPr/>
         </p:nvSpPr>
@@ -8833,7 +9173,7 @@
                 <a:ea typeface="Verdana" pitchFamily="34" charset="-122"/>
                 <a:cs typeface="Verdana" pitchFamily="34" charset="-120"/>
               </a:rPr>
-              <a:t>Who has the train at the start?</a:t>
+              <a:t>Say the word.</a:t>
             </a:r>
             <a:endParaRPr lang="en-US" sz="1500" dirty="0"/>
           </a:p>
@@ -8841,7 +9181,7 @@
       </p:sp>
       <p:sp>
         <p:nvSpPr>
-          <p:cNvPr id="8" name="Text 6"/>
+          <p:cNvPr id="11" name="Text 8"/>
           <p:cNvSpPr/>
           <p:nvPr/>
         </p:nvSpPr>
